--- a/ppt/IoTAI16-TimeSeries.pptx
+++ b/ppt/IoTAI16-TimeSeries.pptx
@@ -5,10 +5,10 @@
     <p:sldMasterId id="2147483653" r:id="rId1"/>
   </p:sldMasterIdLst>
   <p:notesMasterIdLst>
-    <p:notesMasterId r:id="rId12"/>
+    <p:notesMasterId r:id="rId13"/>
   </p:notesMasterIdLst>
   <p:handoutMasterIdLst>
-    <p:handoutMasterId r:id="rId13"/>
+    <p:handoutMasterId r:id="rId14"/>
   </p:handoutMasterIdLst>
   <p:sldIdLst>
     <p:sldId id="264" r:id="rId2"/>
@@ -21,6 +21,7 @@
     <p:sldId id="280" r:id="rId9"/>
     <p:sldId id="284" r:id="rId10"/>
     <p:sldId id="283" r:id="rId11"/>
+    <p:sldId id="285" r:id="rId12"/>
   </p:sldIdLst>
   <p:sldSz cx="9144000" cy="6858000" type="screen4x3"/>
   <p:notesSz cx="6648450" cy="9782175"/>
@@ -3948,6 +3949,123 @@
 </p:sld>
 </file>
 
+<file path=ppt/slides/slide11.xml><?xml version="1.0" encoding="utf-8"?>
+<p:sld xmlns:a="http://schemas.openxmlformats.org/drawingml/2006/main" xmlns:r="http://schemas.openxmlformats.org/officeDocument/2006/relationships" xmlns:p="http://schemas.openxmlformats.org/presentationml/2006/main">
+  <p:cSld>
+    <p:spTree>
+      <p:nvGrpSpPr>
+        <p:cNvPr id="1" name=""/>
+        <p:cNvGrpSpPr/>
+        <p:nvPr/>
+      </p:nvGrpSpPr>
+      <p:grpSpPr>
+        <a:xfrm>
+          <a:off x="0" y="0"/>
+          <a:ext cx="0" cy="0"/>
+          <a:chOff x="0" y="0"/>
+          <a:chExt cx="0" cy="0"/>
+        </a:xfrm>
+      </p:grpSpPr>
+      <p:sp>
+        <p:nvSpPr>
+          <p:cNvPr id="2" name="Titre 1">
+            <a:extLst>
+              <a:ext uri="{FF2B5EF4-FFF2-40B4-BE49-F238E27FC236}">
+                <a16:creationId xmlns:a16="http://schemas.microsoft.com/office/drawing/2014/main" id="{CE5AD877-957B-2533-7823-DF2C58BD9B61}"/>
+              </a:ext>
+            </a:extLst>
+          </p:cNvPr>
+          <p:cNvSpPr>
+            <a:spLocks noGrp="1"/>
+          </p:cNvSpPr>
+          <p:nvPr>
+            <p:ph type="title"/>
+          </p:nvPr>
+        </p:nvSpPr>
+        <p:spPr/>
+        <p:txBody>
+          <a:bodyPr/>
+          <a:lstStyle/>
+          <a:p>
+            <a:r>
+              <a:rPr lang="fr-FR"/>
+              <a:t>TP 15</a:t>
+            </a:r>
+            <a:endParaRPr lang="fr-FR" dirty="0"/>
+          </a:p>
+        </p:txBody>
+      </p:sp>
+      <p:sp>
+        <p:nvSpPr>
+          <p:cNvPr id="3" name="Espace réservé du contenu 2">
+            <a:extLst>
+              <a:ext uri="{FF2B5EF4-FFF2-40B4-BE49-F238E27FC236}">
+                <a16:creationId xmlns:a16="http://schemas.microsoft.com/office/drawing/2014/main" id="{416F6B9E-F49A-24A7-F34A-70CC57E61783}"/>
+              </a:ext>
+            </a:extLst>
+          </p:cNvPr>
+          <p:cNvSpPr>
+            <a:spLocks noGrp="1"/>
+          </p:cNvSpPr>
+          <p:nvPr>
+            <p:ph idx="1"/>
+          </p:nvPr>
+        </p:nvSpPr>
+        <p:spPr/>
+        <p:txBody>
+          <a:bodyPr/>
+          <a:lstStyle/>
+          <a:p>
+            <a:r>
+              <a:rPr lang="fr-FR" dirty="0"/>
+              <a:t>HAR – Human Action Recognition</a:t>
+            </a:r>
+          </a:p>
+        </p:txBody>
+      </p:sp>
+      <p:pic>
+        <p:nvPicPr>
+          <p:cNvPr id="5" name="Image 4">
+            <a:extLst>
+              <a:ext uri="{FF2B5EF4-FFF2-40B4-BE49-F238E27FC236}">
+                <a16:creationId xmlns:a16="http://schemas.microsoft.com/office/drawing/2014/main" id="{81278069-9DD5-0C8B-A1A6-AB147D28F688}"/>
+              </a:ext>
+            </a:extLst>
+          </p:cNvPr>
+          <p:cNvPicPr>
+            <a:picLocks noChangeAspect="1"/>
+          </p:cNvPicPr>
+          <p:nvPr/>
+        </p:nvPicPr>
+        <p:blipFill>
+          <a:blip r:embed="rId2"/>
+          <a:stretch>
+            <a:fillRect/>
+          </a:stretch>
+        </p:blipFill>
+        <p:spPr>
+          <a:xfrm>
+            <a:off x="1691680" y="2060848"/>
+            <a:ext cx="5976664" cy="4030505"/>
+          </a:xfrm>
+          <a:prstGeom prst="rect">
+            <a:avLst/>
+          </a:prstGeom>
+        </p:spPr>
+      </p:pic>
+    </p:spTree>
+    <p:extLst>
+      <p:ext uri="{BB962C8B-B14F-4D97-AF65-F5344CB8AC3E}">
+        <p14:creationId xmlns:p14="http://schemas.microsoft.com/office/powerpoint/2010/main" val="941627625"/>
+      </p:ext>
+    </p:extLst>
+  </p:cSld>
+  <p:clrMapOvr>
+    <a:masterClrMapping/>
+  </p:clrMapOvr>
+</p:sld>
+</file>
+
 <file path=ppt/slides/slide2.xml><?xml version="1.0" encoding="utf-8"?>
 <p:sld xmlns:a="http://schemas.openxmlformats.org/drawingml/2006/main" xmlns:r="http://schemas.openxmlformats.org/officeDocument/2006/relationships" xmlns:p="http://schemas.openxmlformats.org/presentationml/2006/main">
   <p:cSld>
@@ -4412,10 +4530,9 @@
           <a:lstStyle/>
           <a:p>
             <a:r>
-              <a:rPr lang="fr-FR"/>
-              <a:t>TP 15</a:t>
-            </a:r>
-            <a:endParaRPr lang="fr-FR" dirty="0"/>
+              <a:rPr lang="fr-FR" dirty="0"/>
+              <a:t>HAR – Human Action Recognition</a:t>
+            </a:r>
           </a:p>
         </p:txBody>
       </p:sp>
@@ -4440,10 +4557,7 @@
           <a:bodyPr/>
           <a:lstStyle/>
           <a:p>
-            <a:r>
-              <a:rPr lang="fr-FR" dirty="0"/>
-              <a:t>HAR – Human Action Recognition</a:t>
-            </a:r>
+            <a:endParaRPr lang="fr-FR" dirty="0"/>
           </a:p>
         </p:txBody>
       </p:sp>
@@ -4469,8 +4583,8 @@
         </p:blipFill>
         <p:spPr>
           <a:xfrm>
-            <a:off x="1691680" y="2060848"/>
-            <a:ext cx="5976664" cy="4030505"/>
+            <a:off x="996391" y="1340768"/>
+            <a:ext cx="7151218" cy="4822593"/>
           </a:xfrm>
           <a:prstGeom prst="rect">
             <a:avLst/>
